--- a/project/presentation/teamA_pitch_5min.pptx
+++ b/project/presentation/teamA_pitch_5min.pptx
@@ -5702,41 +5702,64 @@
           </a:p>
         </p:txBody>
       </p:sp>
-      <p:sp>
-        <p:nvSpPr>
-          <p:cNvPr id="5" name="Shape 3"/>
-          <p:cNvSpPr/>
-          <p:nvPr/>
-        </p:nvSpPr>
-        <p:spPr>
-          <a:xfrm>
-            <a:off x="777240" y="1783080"/>
-            <a:ext cx="5212080" cy="3200400"/>
-          </a:xfrm>
-          <a:prstGeom prst="rect">
-            <a:avLst/>
-          </a:prstGeom>
-          <a:solidFill>
-            <a:srgbClr val="EAF0F5"/>
-          </a:solidFill>
-          <a:ln w="15875">
-            <a:solidFill>
-              <a:srgbClr val="1C7293"/>
-            </a:solidFill>
-            <a:prstDash val="dash"/>
-          </a:ln>
-        </p:spPr>
-      </p:sp>
-      <p:sp>
-        <p:nvSpPr>
-          <p:cNvPr id="6" name="Text 4"/>
-          <p:cNvSpPr/>
-          <p:nvPr/>
-        </p:nvSpPr>
-        <p:spPr>
-          <a:xfrm>
-            <a:off x="868680" y="2971800"/>
-            <a:ext cx="5029200" cy="822960"/>
+      <p:pic>
+        <p:nvPicPr>
+          <p:cNvPr id="5" name="Image 0" descr="project/presentation/assets/discover_table.png">    </p:cNvPr>
+          <p:cNvPicPr>
+            <a:picLocks noChangeAspect="1"/>
+          </p:cNvPicPr>
+          <p:nvPr/>
+        </p:nvPicPr>
+        <p:blipFill>
+          <a:blip r:embed="rId1"/>
+          <a:stretch>
+            <a:fillRect/>
+          </a:stretch>
+        </p:blipFill>
+        <p:spPr>
+          <a:xfrm>
+            <a:off x="548640" y="1828800"/>
+            <a:ext cx="5532120" cy="1929384"/>
+          </a:xfrm>
+          <a:prstGeom prst="rect">
+            <a:avLst/>
+          </a:prstGeom>
+        </p:spPr>
+      </p:pic>
+      <p:pic>
+        <p:nvPicPr>
+          <p:cNvPr id="6" name="Image 1" descr="project/presentation/assets/qc_panel.png">    </p:cNvPr>
+          <p:cNvPicPr>
+            <a:picLocks noChangeAspect="1"/>
+          </p:cNvPicPr>
+          <p:nvPr/>
+        </p:nvPicPr>
+        <p:blipFill>
+          <a:blip r:embed="rId2"/>
+          <a:stretch>
+            <a:fillRect/>
+          </a:stretch>
+        </p:blipFill>
+        <p:spPr>
+          <a:xfrm>
+            <a:off x="6355080" y="1883664"/>
+            <a:ext cx="5257800" cy="1828800"/>
+          </a:xfrm>
+          <a:prstGeom prst="rect">
+            <a:avLst/>
+          </a:prstGeom>
+        </p:spPr>
+      </p:pic>
+      <p:sp>
+        <p:nvSpPr>
+          <p:cNvPr id="7" name="Text 3"/>
+          <p:cNvSpPr/>
+          <p:nvPr/>
+        </p:nvSpPr>
+        <p:spPr>
+          <a:xfrm>
+            <a:off x="548640" y="3822192"/>
+            <a:ext cx="5532120" cy="274320"/>
           </a:xfrm>
           <a:prstGeom prst="rect">
             <a:avLst/>
@@ -5752,18 +5775,40 @@
               <a:buNone/>
             </a:pPr>
             <a:r>
-              <a:rPr lang="en-US" sz="1300" b="1" dirty="0">
-                <a:solidFill>
-                  <a:srgbClr val="1C7293"/>
-                </a:solidFill>
-                <a:latin typeface="Malgun Gothic" pitchFamily="34" charset="0"/>
-                <a:ea typeface="Malgun Gothic" pitchFamily="34" charset="-122"/>
-                <a:cs typeface="Malgun Gothic" pitchFamily="34" charset="-120"/>
-              </a:rPr>
-              <a:t>🖼  그림 삽입</a:t>
-            </a:r>
-            <a:endParaRPr lang="en-US" sz="1300" dirty="0"/>
-          </a:p>
+              <a:rPr lang="en-US" sz="1100" dirty="0">
+                <a:solidFill>
+                  <a:srgbClr val="5B7185"/>
+                </a:solidFill>
+                <a:latin typeface="Malgun Gothic" pitchFamily="34" charset="0"/>
+                <a:ea typeface="Malgun Gothic" pitchFamily="34" charset="-122"/>
+                <a:cs typeface="Malgun Gothic" pitchFamily="34" charset="-120"/>
+              </a:rPr>
+              <a:t>① discover — 멀티포맷·도메인 자동 분류</a:t>
+            </a:r>
+            <a:endParaRPr lang="en-US" sz="1100" dirty="0"/>
+          </a:p>
+        </p:txBody>
+      </p:sp>
+      <p:sp>
+        <p:nvSpPr>
+          <p:cNvPr id="8" name="Text 4"/>
+          <p:cNvSpPr/>
+          <p:nvPr/>
+        </p:nvSpPr>
+        <p:spPr>
+          <a:xfrm>
+            <a:off x="6355080" y="3822192"/>
+            <a:ext cx="5257800" cy="274320"/>
+          </a:xfrm>
+          <a:prstGeom prst="rect">
+            <a:avLst/>
+          </a:prstGeom>
+          <a:noFill/>
+          <a:ln/>
+        </p:spPr>
+        <p:txBody>
+          <a:bodyPr wrap="square" rtlCol="0" anchor="ctr"/>
+          <a:lstStyle/>
           <a:p>
             <a:pPr algn="ctr" indent="0" marL="0">
               <a:buNone/>
@@ -5777,102 +5822,21 @@
                 <a:ea typeface="Malgun Gothic" pitchFamily="34" charset="-122"/>
                 <a:cs typeface="Malgun Gothic" pitchFamily="34" charset="-120"/>
               </a:rPr>
-              <a:t>discover project/data/ → 멀티포맷·도메인 자동 분류 인벤토리 표</a:t>
-            </a:r>
-            <a:endParaRPr lang="en-US" sz="1300" dirty="0"/>
-          </a:p>
-        </p:txBody>
-      </p:sp>
-      <p:sp>
-        <p:nvSpPr>
-          <p:cNvPr id="7" name="Shape 5"/>
-          <p:cNvSpPr/>
-          <p:nvPr/>
-        </p:nvSpPr>
-        <p:spPr>
-          <a:xfrm>
-            <a:off x="6309360" y="1783080"/>
-            <a:ext cx="5074920" cy="3200400"/>
-          </a:xfrm>
-          <a:prstGeom prst="rect">
-            <a:avLst/>
-          </a:prstGeom>
-          <a:solidFill>
-            <a:srgbClr val="EAF0F5"/>
-          </a:solidFill>
-          <a:ln w="15875">
-            <a:solidFill>
-              <a:srgbClr val="1C7293"/>
-            </a:solidFill>
-            <a:prstDash val="dash"/>
-          </a:ln>
-        </p:spPr>
-      </p:sp>
-      <p:sp>
-        <p:nvSpPr>
-          <p:cNvPr id="8" name="Text 6"/>
-          <p:cNvSpPr/>
-          <p:nvPr/>
-        </p:nvSpPr>
-        <p:spPr>
-          <a:xfrm>
-            <a:off x="6400800" y="2971800"/>
-            <a:ext cx="4892040" cy="822960"/>
-          </a:xfrm>
-          <a:prstGeom prst="rect">
-            <a:avLst/>
-          </a:prstGeom>
-          <a:noFill/>
-          <a:ln/>
-        </p:spPr>
-        <p:txBody>
-          <a:bodyPr wrap="square" rtlCol="0" anchor="ctr"/>
-          <a:lstStyle/>
-          <a:p>
-            <a:pPr algn="ctr" indent="0" marL="0">
-              <a:buNone/>
-            </a:pPr>
-            <a:r>
-              <a:rPr lang="en-US" sz="1300" b="1" dirty="0">
-                <a:solidFill>
-                  <a:srgbClr val="1C7293"/>
-                </a:solidFill>
-                <a:latin typeface="Malgun Gothic" pitchFamily="34" charset="0"/>
-                <a:ea typeface="Malgun Gothic" pitchFamily="34" charset="-122"/>
-                <a:cs typeface="Malgun Gothic" pitchFamily="34" charset="-120"/>
-              </a:rPr>
-              <a:t>🖼  그림 삽입</a:t>
-            </a:r>
-            <a:endParaRPr lang="en-US" sz="1300" dirty="0"/>
-          </a:p>
-          <a:p>
-            <a:pPr algn="ctr" indent="0" marL="0">
-              <a:buNone/>
-            </a:pPr>
-            <a:r>
-              <a:rPr lang="en-US" sz="1100" dirty="0">
-                <a:solidFill>
-                  <a:srgbClr val="5B7185"/>
-                </a:solidFill>
-                <a:latin typeface="Malgun Gothic" pitchFamily="34" charset="0"/>
-                <a:ea typeface="Malgun Gothic" pitchFamily="34" charset="-122"/>
-                <a:cs typeface="Malgun Gothic" pitchFamily="34" charset="-120"/>
-              </a:rPr>
-              <a:t>validate 정상본=PASS 12/12  vs  결함본=FAIL(500K·격자) 리포트</a:t>
-            </a:r>
-            <a:endParaRPr lang="en-US" sz="1300" dirty="0"/>
-          </a:p>
-        </p:txBody>
-      </p:sp>
-      <p:sp>
-        <p:nvSpPr>
-          <p:cNvPr id="9" name="Text 7"/>
-          <p:cNvSpPr/>
-          <p:nvPr/>
-        </p:nvSpPr>
-        <p:spPr>
-          <a:xfrm>
-            <a:off x="822960" y="5166360"/>
+              <a:t>② validate — 정상 PASS / 결함 FAIL 근거 적발</a:t>
+            </a:r>
+            <a:endParaRPr lang="en-US" sz="1100" dirty="0"/>
+          </a:p>
+        </p:txBody>
+      </p:sp>
+      <p:sp>
+        <p:nvSpPr>
+          <p:cNvPr id="9" name="Text 5"/>
+          <p:cNvSpPr/>
+          <p:nvPr/>
+        </p:nvSpPr>
+        <p:spPr>
+          <a:xfrm>
+            <a:off x="822960" y="4297680"/>
             <a:ext cx="10607040" cy="822960"/>
           </a:xfrm>
           <a:prstGeom prst="rect">
@@ -5922,7 +5886,7 @@
                 <a:ea typeface="Malgun Gothic" pitchFamily="34" charset="-122"/>
                 <a:cs typeface="Malgun Gothic" pitchFamily="34" charset="-120"/>
               </a:rPr>
-              <a:t>정상은 통과, 일부러 망가뜨린 파일은 근거와 함께 적발 — 검증을 ‘진짜’ 한다 (실측 완료)</a:t>
+              <a:t>정상은 통과, 망가뜨린 파일은 근거와 함께 적발 — 실측 완료</a:t>
             </a:r>
             <a:endParaRPr lang="en-US" sz="1300" dirty="0"/>
           </a:p>
@@ -5930,7 +5894,7 @@
       </p:sp>
       <p:sp>
         <p:nvSpPr>
-          <p:cNvPr id="10" name="Text 8"/>
+          <p:cNvPr id="10" name="Text 6"/>
           <p:cNvSpPr/>
           <p:nvPr/>
         </p:nvSpPr>
@@ -5969,7 +5933,7 @@
       </p:sp>
       <p:sp>
         <p:nvSpPr>
-          <p:cNvPr id="11" name="Text 9"/>
+          <p:cNvPr id="11" name="Text 7"/>
           <p:cNvSpPr/>
           <p:nvPr/>
         </p:nvSpPr>
@@ -6136,41 +6100,40 @@
           </a:p>
         </p:txBody>
       </p:sp>
-      <p:sp>
-        <p:nvSpPr>
-          <p:cNvPr id="5" name="Shape 3"/>
-          <p:cNvSpPr/>
-          <p:nvPr/>
-        </p:nvSpPr>
-        <p:spPr>
-          <a:xfrm>
-            <a:off x="777240" y="1783080"/>
-            <a:ext cx="3429000" cy="3108960"/>
-          </a:xfrm>
-          <a:prstGeom prst="rect">
-            <a:avLst/>
-          </a:prstGeom>
-          <a:solidFill>
-            <a:srgbClr val="EAF0F5"/>
-          </a:solidFill>
-          <a:ln w="15875">
-            <a:solidFill>
-              <a:srgbClr val="1C7293"/>
-            </a:solidFill>
-            <a:prstDash val="dash"/>
-          </a:ln>
-        </p:spPr>
-      </p:sp>
-      <p:sp>
-        <p:nvSpPr>
-          <p:cNvPr id="6" name="Text 4"/>
-          <p:cNvSpPr/>
-          <p:nvPr/>
-        </p:nvSpPr>
-        <p:spPr>
-          <a:xfrm>
-            <a:off x="868680" y="2926080"/>
-            <a:ext cx="3246120" cy="822960"/>
+      <p:pic>
+        <p:nvPicPr>
+          <p:cNvPr id="5" name="Image 0" descr="project/presentation/assets/wave_validation.png">    </p:cNvPr>
+          <p:cNvPicPr>
+            <a:picLocks noChangeAspect="1"/>
+          </p:cNvPicPr>
+          <p:nvPr/>
+        </p:nvPicPr>
+        <p:blipFill>
+          <a:blip r:embed="rId1"/>
+          <a:stretch>
+            <a:fillRect/>
+          </a:stretch>
+        </p:blipFill>
+        <p:spPr>
+          <a:xfrm>
+            <a:off x="1161288" y="1719072"/>
+            <a:ext cx="9875520" cy="3291840"/>
+          </a:xfrm>
+          <a:prstGeom prst="rect">
+            <a:avLst/>
+          </a:prstGeom>
+        </p:spPr>
+      </p:pic>
+      <p:sp>
+        <p:nvSpPr>
+          <p:cNvPr id="6" name="Text 3"/>
+          <p:cNvSpPr/>
+          <p:nvPr/>
+        </p:nvSpPr>
+        <p:spPr>
+          <a:xfrm>
+            <a:off x="822960" y="5047488"/>
+            <a:ext cx="10607040" cy="292608"/>
           </a:xfrm>
           <a:prstGeom prst="rect">
             <a:avLst/>
@@ -6186,229 +6149,46 @@
               <a:buNone/>
             </a:pPr>
             <a:r>
-              <a:rPr lang="en-US" sz="1300" b="1" dirty="0">
-                <a:solidFill>
-                  <a:srgbClr val="1C7293"/>
-                </a:solidFill>
-                <a:latin typeface="Malgun Gothic" pitchFamily="34" charset="0"/>
-                <a:ea typeface="Malgun Gothic" pitchFamily="34" charset="-122"/>
-                <a:cs typeface="Malgun Gothic" pitchFamily="34" charset="-120"/>
-              </a:rPr>
-              <a:t>🖼  그림 삽입</a:t>
-            </a:r>
-            <a:endParaRPr lang="en-US" sz="1300" dirty="0"/>
-          </a:p>
+              <a:rPr lang="en-US" sz="1250" b="1" dirty="0">
+                <a:solidFill>
+                  <a:srgbClr val="0A5078"/>
+                </a:solidFill>
+                <a:latin typeface="Malgun Gothic" pitchFamily="34" charset="0"/>
+                <a:ea typeface="Malgun Gothic" pitchFamily="34" charset="-122"/>
+                <a:cs typeface="Malgun Gothic" pitchFamily="34" charset="-120"/>
+              </a:rPr>
+              <a:t>WW3 vs 부이 · 2024-09-15 · N=393 · 17지점   —   bias −0.12 m · SI 0.43 · R 0.74</a:t>
+            </a:r>
+            <a:endParaRPr lang="en-US" sz="1250" dirty="0"/>
+          </a:p>
+        </p:txBody>
+      </p:sp>
+      <p:sp>
+        <p:nvSpPr>
+          <p:cNvPr id="7" name="Text 4"/>
+          <p:cNvSpPr/>
+          <p:nvPr/>
+        </p:nvSpPr>
+        <p:spPr>
+          <a:xfrm>
+            <a:off x="822960" y="5440680"/>
+            <a:ext cx="10607040" cy="457200"/>
+          </a:xfrm>
+          <a:prstGeom prst="rect">
+            <a:avLst/>
+          </a:prstGeom>
+          <a:noFill/>
+          <a:ln/>
+        </p:spPr>
+        <p:txBody>
+          <a:bodyPr wrap="square" rtlCol="0" anchor="ctr"/>
+          <a:lstStyle/>
           <a:p>
             <a:pPr algn="ctr" indent="0" marL="0">
               <a:buNone/>
             </a:pPr>
             <a:r>
-              <a:rPr lang="en-US" sz="1100" dirty="0">
-                <a:solidFill>
-                  <a:srgbClr val="5B7185"/>
-                </a:solidFill>
-                <a:latin typeface="Malgun Gothic" pitchFamily="34" charset="0"/>
-                <a:ea typeface="Malgun Gothic" pitchFamily="34" charset="-122"/>
-                <a:cs typeface="Malgun Gothic" pitchFamily="34" charset="-120"/>
-              </a:rPr>
-              <a:t>Hs 산점도 + SI/회귀</a:t>
-            </a:r>
-            <a:endParaRPr lang="en-US" sz="1300" dirty="0"/>
-          </a:p>
-        </p:txBody>
-      </p:sp>
-      <p:sp>
-        <p:nvSpPr>
-          <p:cNvPr id="7" name="Shape 5"/>
-          <p:cNvSpPr/>
-          <p:nvPr/>
-        </p:nvSpPr>
-        <p:spPr>
-          <a:xfrm>
-            <a:off x="4370832" y="1783080"/>
-            <a:ext cx="3429000" cy="3108960"/>
-          </a:xfrm>
-          <a:prstGeom prst="rect">
-            <a:avLst/>
-          </a:prstGeom>
-          <a:solidFill>
-            <a:srgbClr val="EAF0F5"/>
-          </a:solidFill>
-          <a:ln w="15875">
-            <a:solidFill>
-              <a:srgbClr val="1C7293"/>
-            </a:solidFill>
-            <a:prstDash val="dash"/>
-          </a:ln>
-        </p:spPr>
-      </p:sp>
-      <p:sp>
-        <p:nvSpPr>
-          <p:cNvPr id="8" name="Text 6"/>
-          <p:cNvSpPr/>
-          <p:nvPr/>
-        </p:nvSpPr>
-        <p:spPr>
-          <a:xfrm>
-            <a:off x="4462272" y="2926080"/>
-            <a:ext cx="3246120" cy="822960"/>
-          </a:xfrm>
-          <a:prstGeom prst="rect">
-            <a:avLst/>
-          </a:prstGeom>
-          <a:noFill/>
-          <a:ln/>
-        </p:spPr>
-        <p:txBody>
-          <a:bodyPr wrap="square" rtlCol="0" anchor="ctr"/>
-          <a:lstStyle/>
-          <a:p>
-            <a:pPr algn="ctr" indent="0" marL="0">
-              <a:buNone/>
-            </a:pPr>
-            <a:r>
-              <a:rPr lang="en-US" sz="1300" b="1" dirty="0">
-                <a:solidFill>
-                  <a:srgbClr val="1C7293"/>
-                </a:solidFill>
-                <a:latin typeface="Malgun Gothic" pitchFamily="34" charset="0"/>
-                <a:ea typeface="Malgun Gothic" pitchFamily="34" charset="-122"/>
-                <a:cs typeface="Malgun Gothic" pitchFamily="34" charset="-120"/>
-              </a:rPr>
-              <a:t>🖼  그림 삽입</a:t>
-            </a:r>
-            <a:endParaRPr lang="en-US" sz="1300" dirty="0"/>
-          </a:p>
-          <a:p>
-            <a:pPr algn="ctr" indent="0" marL="0">
-              <a:buNone/>
-            </a:pPr>
-            <a:r>
-              <a:rPr lang="en-US" sz="1100" dirty="0">
-                <a:solidFill>
-                  <a:srgbClr val="5B7185"/>
-                </a:solidFill>
-                <a:latin typeface="Malgun Gothic" pitchFamily="34" charset="0"/>
-                <a:ea typeface="Malgun Gothic" pitchFamily="34" charset="-122"/>
-                <a:cs typeface="Malgun Gothic" pitchFamily="34" charset="-120"/>
-              </a:rPr>
-              <a:t>파향 wave rose</a:t>
-            </a:r>
-            <a:endParaRPr lang="en-US" sz="1300" dirty="0"/>
-          </a:p>
-        </p:txBody>
-      </p:sp>
-      <p:sp>
-        <p:nvSpPr>
-          <p:cNvPr id="9" name="Shape 7"/>
-          <p:cNvSpPr/>
-          <p:nvPr/>
-        </p:nvSpPr>
-        <p:spPr>
-          <a:xfrm>
-            <a:off x="7955280" y="1783080"/>
-            <a:ext cx="3429000" cy="3108960"/>
-          </a:xfrm>
-          <a:prstGeom prst="rect">
-            <a:avLst/>
-          </a:prstGeom>
-          <a:solidFill>
-            <a:srgbClr val="EAF0F5"/>
-          </a:solidFill>
-          <a:ln w="15875">
-            <a:solidFill>
-              <a:srgbClr val="1C7293"/>
-            </a:solidFill>
-            <a:prstDash val="dash"/>
-          </a:ln>
-        </p:spPr>
-      </p:sp>
-      <p:sp>
-        <p:nvSpPr>
-          <p:cNvPr id="10" name="Text 8"/>
-          <p:cNvSpPr/>
-          <p:nvPr/>
-        </p:nvSpPr>
-        <p:spPr>
-          <a:xfrm>
-            <a:off x="8046720" y="2926080"/>
-            <a:ext cx="3246120" cy="822960"/>
-          </a:xfrm>
-          <a:prstGeom prst="rect">
-            <a:avLst/>
-          </a:prstGeom>
-          <a:noFill/>
-          <a:ln/>
-        </p:spPr>
-        <p:txBody>
-          <a:bodyPr wrap="square" rtlCol="0" anchor="ctr"/>
-          <a:lstStyle/>
-          <a:p>
-            <a:pPr algn="ctr" indent="0" marL="0">
-              <a:buNone/>
-            </a:pPr>
-            <a:r>
-              <a:rPr lang="en-US" sz="1300" b="1" dirty="0">
-                <a:solidFill>
-                  <a:srgbClr val="1C7293"/>
-                </a:solidFill>
-                <a:latin typeface="Malgun Gothic" pitchFamily="34" charset="0"/>
-                <a:ea typeface="Malgun Gothic" pitchFamily="34" charset="-122"/>
-                <a:cs typeface="Malgun Gothic" pitchFamily="34" charset="-120"/>
-              </a:rPr>
-              <a:t>🖼  그림 삽입</a:t>
-            </a:r>
-            <a:endParaRPr lang="en-US" sz="1300" dirty="0"/>
-          </a:p>
-          <a:p>
-            <a:pPr algn="ctr" indent="0" marL="0">
-              <a:buNone/>
-            </a:pPr>
-            <a:r>
-              <a:rPr lang="en-US" sz="1100" dirty="0">
-                <a:solidFill>
-                  <a:srgbClr val="5B7185"/>
-                </a:solidFill>
-                <a:latin typeface="Malgun Gothic" pitchFamily="34" charset="0"/>
-                <a:ea typeface="Malgun Gothic" pitchFamily="34" charset="-122"/>
-                <a:cs typeface="Malgun Gothic" pitchFamily="34" charset="-120"/>
-              </a:rPr>
-              <a:t>2024-09-15 고파 피크 시계열 (부이 vs WW3)</a:t>
-            </a:r>
-            <a:endParaRPr lang="en-US" sz="1300" dirty="0"/>
-          </a:p>
-        </p:txBody>
-      </p:sp>
-      <p:sp>
-        <p:nvSpPr>
-          <p:cNvPr id="11" name="Text 9"/>
-          <p:cNvSpPr/>
-          <p:nvPr/>
-        </p:nvSpPr>
-        <p:spPr>
-          <a:xfrm>
-            <a:off x="822960" y="5120640"/>
-            <a:ext cx="10607040" cy="822960"/>
-          </a:xfrm>
-          <a:prstGeom prst="rect">
-            <a:avLst/>
-          </a:prstGeom>
-          <a:noFill/>
-          <a:ln/>
-        </p:spPr>
-        <p:txBody>
-          <a:bodyPr wrap="square" rtlCol="0" anchor="ctr"/>
-          <a:lstStyle/>
-          <a:p>
-            <a:pPr marL="342900" indent="-342900">
-              <a:spcAft>
-                <a:spcPts val="400"/>
-              </a:spcAft>
-              <a:buSzPct val="100000"/>
-              <a:buChar char="•"/>
-            </a:pPr>
-            <a:r>
-              <a:rPr lang="en-US" sz="1300" dirty="0">
+              <a:rPr lang="en-US" sz="1200" dirty="0">
                 <a:solidFill>
                   <a:srgbClr val="16263B"/>
                 </a:solidFill>
@@ -6416,36 +6196,15 @@
                 <a:ea typeface="Malgun Gothic" pitchFamily="34" charset="-122"/>
                 <a:cs typeface="Malgun Gothic" pitchFamily="34" charset="-120"/>
               </a:rPr>
-              <a:t>부이 지점에 모델 최근접 매칭 → 정확도(SI·RMSE)·분포·방향·이벤트·해역별 다축</a:t>
-            </a:r>
-            <a:endParaRPr lang="en-US" sz="1300" dirty="0"/>
-          </a:p>
-          <a:p>
-            <a:pPr marL="342900" indent="-342900">
-              <a:spcAft>
-                <a:spcPts val="400"/>
-              </a:spcAft>
-              <a:buSzPct val="100000"/>
-              <a:buChar char="•"/>
-            </a:pPr>
-            <a:r>
-              <a:rPr lang="en-US" sz="1300" dirty="0">
-                <a:solidFill>
-                  <a:srgbClr val="16263B"/>
-                </a:solidFill>
-                <a:latin typeface="Malgun Gothic" pitchFamily="34" charset="0"/>
-                <a:ea typeface="Malgun Gothic" pitchFamily="34" charset="-122"/>
-                <a:cs typeface="Malgun Gothic" pitchFamily="34" charset="-120"/>
-              </a:rPr>
-              <a:t>리포트에 ‘부이=점관측·기준자료≠참값’ 경고 자동</a:t>
-            </a:r>
-            <a:endParaRPr lang="en-US" sz="1300" dirty="0"/>
-          </a:p>
-        </p:txBody>
-      </p:sp>
-      <p:sp>
-        <p:nvSpPr>
-          <p:cNvPr id="12" name="Text 10"/>
+              <a:t>부이 지점 최근접 매칭 → 정확도·분포·시계열 다축 · 09-15 피크에서 모델 과소(스킬이 좌표 출처를 자동 발견)</a:t>
+            </a:r>
+            <a:endParaRPr lang="en-US" sz="1200" dirty="0"/>
+          </a:p>
+        </p:txBody>
+      </p:sp>
+      <p:sp>
+        <p:nvSpPr>
+          <p:cNvPr id="8" name="Text 5"/>
           <p:cNvSpPr/>
           <p:nvPr/>
         </p:nvSpPr>
@@ -6484,7 +6243,7 @@
       </p:sp>
       <p:sp>
         <p:nvSpPr>
-          <p:cNvPr id="13" name="Text 11"/>
+          <p:cNvPr id="9" name="Text 6"/>
           <p:cNvSpPr/>
           <p:nvPr/>
         </p:nvSpPr>
